--- a/class/cloud_infra_mgmt/06주차_Kubernetes핵심2/01_강의자료/2차시_PV와PVC실습.pptx
+++ b/class/cloud_infra_mgmt/06주차_Kubernetes핵심2/01_강의자료/2차시_PV와PVC실습.pptx
@@ -8824,7 +8824,7 @@
               </a:lnSpc>
             </a:pPr>
             <a:r>
-              <a:rPr sz="1500" b="1">
+              <a:rPr sz="1700" b="1">
                 <a:solidFill>
                   <a:srgbClr val="0D9488"/>
                 </a:solidFill>
@@ -8833,7 +8833,7 @@
               <a:t>●  </a:t>
             </a:r>
             <a:r>
-              <a:rPr sz="1500" b="0">
+              <a:rPr sz="1700" b="0">
                 <a:solidFill>
                   <a:srgbClr val="222733"/>
                 </a:solidFill>
@@ -8849,7 +8849,7 @@
               </a:lnSpc>
             </a:pPr>
             <a:r>
-              <a:rPr sz="1500" b="1">
+              <a:rPr sz="1700" b="1">
                 <a:solidFill>
                   <a:srgbClr val="0D9488"/>
                 </a:solidFill>
@@ -8858,7 +8858,7 @@
               <a:t>●  </a:t>
             </a:r>
             <a:r>
-              <a:rPr sz="1500" b="0">
+              <a:rPr sz="1700" b="0">
                 <a:solidFill>
                   <a:srgbClr val="222733"/>
                 </a:solidFill>
@@ -8874,7 +8874,7 @@
               </a:lnSpc>
             </a:pPr>
             <a:r>
-              <a:rPr sz="1500" b="1">
+              <a:rPr sz="1700" b="1">
                 <a:solidFill>
                   <a:srgbClr val="0D9488"/>
                 </a:solidFill>
@@ -8883,7 +8883,7 @@
               <a:t>●  </a:t>
             </a:r>
             <a:r>
-              <a:rPr sz="1500" b="0">
+              <a:rPr sz="1700" b="0">
                 <a:solidFill>
                   <a:srgbClr val="222733"/>
                 </a:solidFill>

--- a/class/cloud_infra_mgmt/06주차_Kubernetes핵심2/01_강의자료/2차시_PV와PVC실습.pptx
+++ b/class/cloud_infra_mgmt/06주차_Kubernetes핵심2/01_강의자료/2차시_PV와PVC실습.pptx
@@ -5119,7 +5119,7 @@
           <a:p>
             <a:pPr>
               <a:lnSpc>
-                <a:spcPct val="115000"/>
+                <a:spcPct val="149500"/>
               </a:lnSpc>
             </a:pPr>
             <a:r>
@@ -5144,7 +5144,7 @@
           <a:p>
             <a:pPr>
               <a:lnSpc>
-                <a:spcPct val="115000"/>
+                <a:spcPct val="149500"/>
               </a:lnSpc>
             </a:pPr>
             <a:r>
@@ -5169,7 +5169,7 @@
           <a:p>
             <a:pPr>
               <a:lnSpc>
-                <a:spcPct val="115000"/>
+                <a:spcPct val="149500"/>
               </a:lnSpc>
             </a:pPr>
             <a:r>
@@ -6418,16 +6418,104 @@
       </p:sp>
       <p:sp>
         <p:nvSpPr>
-          <p:cNvPr id="7" name="Isosceles Triangle 6"/>
+          <p:cNvPr id="7" name="Rectangle 6"/>
           <p:cNvSpPr/>
           <p:nvPr/>
         </p:nvSpPr>
         <p:spPr>
-          <a:xfrm rot="5400000">
-            <a:off x="3495751" y="1673352"/>
-            <a:ext cx="146304" cy="146304"/>
-          </a:xfrm>
-          <a:prstGeom prst="triangle">
+          <a:xfrm>
+            <a:off x="5096865" y="1730959"/>
+            <a:ext cx="1995220" cy="31089"/>
+          </a:xfrm>
+          <a:prstGeom prst="rect">
+            <a:avLst/>
+          </a:prstGeom>
+          <a:solidFill>
+            <a:srgbClr val="14B8A6"/>
+          </a:solidFill>
+          <a:ln>
+            <a:noFill/>
+          </a:ln>
+          <a:effectLst/>
+        </p:spPr>
+        <p:style>
+          <a:lnRef idx="1">
+            <a:schemeClr val="accent1"/>
+          </a:lnRef>
+          <a:fillRef idx="3">
+            <a:schemeClr val="accent1"/>
+          </a:fillRef>
+          <a:effectRef idx="2">
+            <a:schemeClr val="accent1"/>
+          </a:effectRef>
+          <a:fontRef idx="minor">
+            <a:schemeClr val="lt1"/>
+          </a:fontRef>
+        </p:style>
+        <p:txBody>
+          <a:bodyPr rtlCol="0" anchor="ctr"/>
+          <a:lstStyle/>
+          <a:p>
+            <a:pPr algn="ctr"/>
+          </a:p>
+        </p:txBody>
+      </p:sp>
+      <p:sp>
+        <p:nvSpPr>
+          <p:cNvPr id="8" name="Rectangle 7"/>
+          <p:cNvSpPr/>
+          <p:nvPr/>
+        </p:nvSpPr>
+        <p:spPr>
+          <a:xfrm>
+            <a:off x="7622438" y="1730959"/>
+            <a:ext cx="1995220" cy="31089"/>
+          </a:xfrm>
+          <a:prstGeom prst="rect">
+            <a:avLst/>
+          </a:prstGeom>
+          <a:solidFill>
+            <a:srgbClr val="14B8A6"/>
+          </a:solidFill>
+          <a:ln>
+            <a:noFill/>
+          </a:ln>
+          <a:effectLst/>
+        </p:spPr>
+        <p:style>
+          <a:lnRef idx="1">
+            <a:schemeClr val="accent1"/>
+          </a:lnRef>
+          <a:fillRef idx="3">
+            <a:schemeClr val="accent1"/>
+          </a:fillRef>
+          <a:effectRef idx="2">
+            <a:schemeClr val="accent1"/>
+          </a:effectRef>
+          <a:fontRef idx="minor">
+            <a:schemeClr val="lt1"/>
+          </a:fontRef>
+        </p:style>
+        <p:txBody>
+          <a:bodyPr rtlCol="0" anchor="ctr"/>
+          <a:lstStyle/>
+          <a:p>
+            <a:pPr algn="ctr"/>
+          </a:p>
+        </p:txBody>
+      </p:sp>
+      <p:sp>
+        <p:nvSpPr>
+          <p:cNvPr id="9" name="Oval 8"/>
+          <p:cNvSpPr/>
+          <p:nvPr/>
+        </p:nvSpPr>
+        <p:spPr>
+          <a:xfrm>
+            <a:off x="2040940" y="1481328"/>
+            <a:ext cx="530352" cy="530352"/>
+          </a:xfrm>
+          <a:prstGeom prst="ellipse">
             <a:avLst/>
           </a:prstGeom>
           <a:solidFill>
@@ -6462,227 +6550,7 @@
       </p:sp>
       <p:sp>
         <p:nvSpPr>
-          <p:cNvPr id="8" name="Rectangle 7"/>
-          <p:cNvSpPr/>
-          <p:nvPr/>
-        </p:nvSpPr>
-        <p:spPr>
-          <a:xfrm>
-            <a:off x="5096865" y="1730959"/>
-            <a:ext cx="1995220" cy="31089"/>
-          </a:xfrm>
-          <a:prstGeom prst="rect">
-            <a:avLst/>
-          </a:prstGeom>
-          <a:solidFill>
-            <a:srgbClr val="14B8A6"/>
-          </a:solidFill>
-          <a:ln>
-            <a:noFill/>
-          </a:ln>
-          <a:effectLst/>
-        </p:spPr>
-        <p:style>
-          <a:lnRef idx="1">
-            <a:schemeClr val="accent1"/>
-          </a:lnRef>
-          <a:fillRef idx="3">
-            <a:schemeClr val="accent1"/>
-          </a:fillRef>
-          <a:effectRef idx="2">
-            <a:schemeClr val="accent1"/>
-          </a:effectRef>
-          <a:fontRef idx="minor">
-            <a:schemeClr val="lt1"/>
-          </a:fontRef>
-        </p:style>
-        <p:txBody>
-          <a:bodyPr rtlCol="0" anchor="ctr"/>
-          <a:lstStyle/>
-          <a:p>
-            <a:pPr algn="ctr"/>
-          </a:p>
-        </p:txBody>
-      </p:sp>
-      <p:sp>
-        <p:nvSpPr>
-          <p:cNvPr id="9" name="Isosceles Triangle 8"/>
-          <p:cNvSpPr/>
-          <p:nvPr/>
-        </p:nvSpPr>
-        <p:spPr>
-          <a:xfrm rot="5400000">
-            <a:off x="6021324" y="1673352"/>
-            <a:ext cx="146304" cy="146304"/>
-          </a:xfrm>
-          <a:prstGeom prst="triangle">
-            <a:avLst/>
-          </a:prstGeom>
-          <a:solidFill>
-            <a:srgbClr val="0D9488"/>
-          </a:solidFill>
-          <a:ln>
-            <a:noFill/>
-          </a:ln>
-          <a:effectLst/>
-        </p:spPr>
-        <p:style>
-          <a:lnRef idx="1">
-            <a:schemeClr val="accent1"/>
-          </a:lnRef>
-          <a:fillRef idx="3">
-            <a:schemeClr val="accent1"/>
-          </a:fillRef>
-          <a:effectRef idx="2">
-            <a:schemeClr val="accent1"/>
-          </a:effectRef>
-          <a:fontRef idx="minor">
-            <a:schemeClr val="lt1"/>
-          </a:fontRef>
-        </p:style>
-        <p:txBody>
-          <a:bodyPr rtlCol="0" anchor="ctr"/>
-          <a:lstStyle/>
-          <a:p>
-            <a:pPr algn="ctr"/>
-          </a:p>
-        </p:txBody>
-      </p:sp>
-      <p:sp>
-        <p:nvSpPr>
-          <p:cNvPr id="10" name="Rectangle 9"/>
-          <p:cNvSpPr/>
-          <p:nvPr/>
-        </p:nvSpPr>
-        <p:spPr>
-          <a:xfrm>
-            <a:off x="7622438" y="1730959"/>
-            <a:ext cx="1995220" cy="31089"/>
-          </a:xfrm>
-          <a:prstGeom prst="rect">
-            <a:avLst/>
-          </a:prstGeom>
-          <a:solidFill>
-            <a:srgbClr val="14B8A6"/>
-          </a:solidFill>
-          <a:ln>
-            <a:noFill/>
-          </a:ln>
-          <a:effectLst/>
-        </p:spPr>
-        <p:style>
-          <a:lnRef idx="1">
-            <a:schemeClr val="accent1"/>
-          </a:lnRef>
-          <a:fillRef idx="3">
-            <a:schemeClr val="accent1"/>
-          </a:fillRef>
-          <a:effectRef idx="2">
-            <a:schemeClr val="accent1"/>
-          </a:effectRef>
-          <a:fontRef idx="minor">
-            <a:schemeClr val="lt1"/>
-          </a:fontRef>
-        </p:style>
-        <p:txBody>
-          <a:bodyPr rtlCol="0" anchor="ctr"/>
-          <a:lstStyle/>
-          <a:p>
-            <a:pPr algn="ctr"/>
-          </a:p>
-        </p:txBody>
-      </p:sp>
-      <p:sp>
-        <p:nvSpPr>
-          <p:cNvPr id="11" name="Isosceles Triangle 10"/>
-          <p:cNvSpPr/>
-          <p:nvPr/>
-        </p:nvSpPr>
-        <p:spPr>
-          <a:xfrm rot="5400000">
-            <a:off x="8546896" y="1673352"/>
-            <a:ext cx="146304" cy="146304"/>
-          </a:xfrm>
-          <a:prstGeom prst="triangle">
-            <a:avLst/>
-          </a:prstGeom>
-          <a:solidFill>
-            <a:srgbClr val="0D9488"/>
-          </a:solidFill>
-          <a:ln>
-            <a:noFill/>
-          </a:ln>
-          <a:effectLst/>
-        </p:spPr>
-        <p:style>
-          <a:lnRef idx="1">
-            <a:schemeClr val="accent1"/>
-          </a:lnRef>
-          <a:fillRef idx="3">
-            <a:schemeClr val="accent1"/>
-          </a:fillRef>
-          <a:effectRef idx="2">
-            <a:schemeClr val="accent1"/>
-          </a:effectRef>
-          <a:fontRef idx="minor">
-            <a:schemeClr val="lt1"/>
-          </a:fontRef>
-        </p:style>
-        <p:txBody>
-          <a:bodyPr rtlCol="0" anchor="ctr"/>
-          <a:lstStyle/>
-          <a:p>
-            <a:pPr algn="ctr"/>
-          </a:p>
-        </p:txBody>
-      </p:sp>
-      <p:sp>
-        <p:nvSpPr>
-          <p:cNvPr id="12" name="Oval 11"/>
-          <p:cNvSpPr/>
-          <p:nvPr/>
-        </p:nvSpPr>
-        <p:spPr>
-          <a:xfrm>
-            <a:off x="2040940" y="1481328"/>
-            <a:ext cx="530352" cy="530352"/>
-          </a:xfrm>
-          <a:prstGeom prst="ellipse">
-            <a:avLst/>
-          </a:prstGeom>
-          <a:solidFill>
-            <a:srgbClr val="0D9488"/>
-          </a:solidFill>
-          <a:ln>
-            <a:noFill/>
-          </a:ln>
-          <a:effectLst/>
-        </p:spPr>
-        <p:style>
-          <a:lnRef idx="1">
-            <a:schemeClr val="accent1"/>
-          </a:lnRef>
-          <a:fillRef idx="3">
-            <a:schemeClr val="accent1"/>
-          </a:fillRef>
-          <a:effectRef idx="2">
-            <a:schemeClr val="accent1"/>
-          </a:effectRef>
-          <a:fontRef idx="minor">
-            <a:schemeClr val="lt1"/>
-          </a:fontRef>
-        </p:style>
-        <p:txBody>
-          <a:bodyPr rtlCol="0" anchor="ctr"/>
-          <a:lstStyle/>
-          <a:p>
-            <a:pPr algn="ctr"/>
-          </a:p>
-        </p:txBody>
-      </p:sp>
-      <p:sp>
-        <p:nvSpPr>
-          <p:cNvPr id="13" name="TextBox 12"/>
+          <p:cNvPr id="10" name="TextBox 9"/>
           <p:cNvSpPr txBox="1"/>
           <p:nvPr/>
         </p:nvSpPr>
@@ -6717,7 +6585,7 @@
       </p:sp>
       <p:sp>
         <p:nvSpPr>
-          <p:cNvPr id="14" name="Rounded Rectangle 13"/>
+          <p:cNvPr id="11" name="Rounded Rectangle 10"/>
           <p:cNvSpPr/>
           <p:nvPr/>
         </p:nvSpPr>
@@ -6765,7 +6633,7 @@
       </p:sp>
       <p:sp>
         <p:nvSpPr>
-          <p:cNvPr id="15" name="TextBox 14"/>
+          <p:cNvPr id="12" name="TextBox 11"/>
           <p:cNvSpPr txBox="1"/>
           <p:nvPr/>
         </p:nvSpPr>
@@ -6800,7 +6668,7 @@
       </p:sp>
       <p:sp>
         <p:nvSpPr>
-          <p:cNvPr id="16" name="TextBox 15"/>
+          <p:cNvPr id="13" name="TextBox 12"/>
           <p:cNvSpPr txBox="1"/>
           <p:nvPr/>
         </p:nvSpPr>
@@ -6839,7 +6707,7 @@
       </p:sp>
       <p:sp>
         <p:nvSpPr>
-          <p:cNvPr id="17" name="Oval 16"/>
+          <p:cNvPr id="14" name="Oval 13"/>
           <p:cNvSpPr/>
           <p:nvPr/>
         </p:nvSpPr>
@@ -6883,7 +6751,7 @@
       </p:sp>
       <p:sp>
         <p:nvSpPr>
-          <p:cNvPr id="18" name="TextBox 17"/>
+          <p:cNvPr id="15" name="TextBox 14"/>
           <p:cNvSpPr txBox="1"/>
           <p:nvPr/>
         </p:nvSpPr>
@@ -6918,7 +6786,7 @@
       </p:sp>
       <p:sp>
         <p:nvSpPr>
-          <p:cNvPr id="19" name="Rounded Rectangle 18"/>
+          <p:cNvPr id="16" name="Rounded Rectangle 15"/>
           <p:cNvSpPr/>
           <p:nvPr/>
         </p:nvSpPr>
@@ -6966,7 +6834,7 @@
       </p:sp>
       <p:sp>
         <p:nvSpPr>
-          <p:cNvPr id="20" name="TextBox 19"/>
+          <p:cNvPr id="17" name="TextBox 16"/>
           <p:cNvSpPr txBox="1"/>
           <p:nvPr/>
         </p:nvSpPr>
@@ -7001,7 +6869,7 @@
       </p:sp>
       <p:sp>
         <p:nvSpPr>
-          <p:cNvPr id="21" name="TextBox 20"/>
+          <p:cNvPr id="18" name="TextBox 17"/>
           <p:cNvSpPr txBox="1"/>
           <p:nvPr/>
         </p:nvSpPr>
@@ -7040,7 +6908,7 @@
       </p:sp>
       <p:sp>
         <p:nvSpPr>
-          <p:cNvPr id="22" name="Oval 21"/>
+          <p:cNvPr id="19" name="Oval 18"/>
           <p:cNvSpPr/>
           <p:nvPr/>
         </p:nvSpPr>
@@ -7084,7 +6952,7 @@
       </p:sp>
       <p:sp>
         <p:nvSpPr>
-          <p:cNvPr id="23" name="TextBox 22"/>
+          <p:cNvPr id="20" name="TextBox 19"/>
           <p:cNvSpPr txBox="1"/>
           <p:nvPr/>
         </p:nvSpPr>
@@ -7119,7 +6987,7 @@
       </p:sp>
       <p:sp>
         <p:nvSpPr>
-          <p:cNvPr id="24" name="Rounded Rectangle 23"/>
+          <p:cNvPr id="21" name="Rounded Rectangle 20"/>
           <p:cNvSpPr/>
           <p:nvPr/>
         </p:nvSpPr>
@@ -7167,7 +7035,7 @@
       </p:sp>
       <p:sp>
         <p:nvSpPr>
-          <p:cNvPr id="25" name="TextBox 24"/>
+          <p:cNvPr id="22" name="TextBox 21"/>
           <p:cNvSpPr txBox="1"/>
           <p:nvPr/>
         </p:nvSpPr>
@@ -7202,7 +7070,7 @@
       </p:sp>
       <p:sp>
         <p:nvSpPr>
-          <p:cNvPr id="26" name="TextBox 25"/>
+          <p:cNvPr id="23" name="TextBox 22"/>
           <p:cNvSpPr txBox="1"/>
           <p:nvPr/>
         </p:nvSpPr>
@@ -7241,7 +7109,7 @@
       </p:sp>
       <p:sp>
         <p:nvSpPr>
-          <p:cNvPr id="27" name="Oval 26"/>
+          <p:cNvPr id="24" name="Oval 23"/>
           <p:cNvSpPr/>
           <p:nvPr/>
         </p:nvSpPr>
@@ -7285,7 +7153,7 @@
       </p:sp>
       <p:sp>
         <p:nvSpPr>
-          <p:cNvPr id="28" name="TextBox 27"/>
+          <p:cNvPr id="25" name="TextBox 24"/>
           <p:cNvSpPr txBox="1"/>
           <p:nvPr/>
         </p:nvSpPr>
@@ -7320,7 +7188,7 @@
       </p:sp>
       <p:sp>
         <p:nvSpPr>
-          <p:cNvPr id="29" name="Rounded Rectangle 28"/>
+          <p:cNvPr id="26" name="Rounded Rectangle 25"/>
           <p:cNvSpPr/>
           <p:nvPr/>
         </p:nvSpPr>
@@ -7368,7 +7236,7 @@
       </p:sp>
       <p:sp>
         <p:nvSpPr>
-          <p:cNvPr id="30" name="TextBox 29"/>
+          <p:cNvPr id="27" name="TextBox 26"/>
           <p:cNvSpPr txBox="1"/>
           <p:nvPr/>
         </p:nvSpPr>
@@ -7403,7 +7271,7 @@
       </p:sp>
       <p:sp>
         <p:nvSpPr>
-          <p:cNvPr id="31" name="TextBox 30"/>
+          <p:cNvPr id="28" name="TextBox 27"/>
           <p:cNvSpPr txBox="1"/>
           <p:nvPr/>
         </p:nvSpPr>
@@ -7442,7 +7310,7 @@
       </p:sp>
       <p:sp>
         <p:nvSpPr>
-          <p:cNvPr id="32" name="TextBox 31"/>
+          <p:cNvPr id="29" name="TextBox 28"/>
           <p:cNvSpPr txBox="1"/>
           <p:nvPr/>
         </p:nvSpPr>
@@ -7477,7 +7345,7 @@
       </p:sp>
       <p:sp>
         <p:nvSpPr>
-          <p:cNvPr id="33" name="TextBox 32"/>
+          <p:cNvPr id="30" name="TextBox 29"/>
           <p:cNvSpPr txBox="1"/>
           <p:nvPr/>
         </p:nvSpPr>
@@ -7512,7 +7380,7 @@
       </p:sp>
       <p:sp>
         <p:nvSpPr>
-          <p:cNvPr id="34" name="Rectangle 33"/>
+          <p:cNvPr id="31" name="Rectangle 30"/>
           <p:cNvSpPr/>
           <p:nvPr/>
         </p:nvSpPr>
@@ -8036,7 +7904,7 @@
           <a:p>
             <a:pPr>
               <a:lnSpc>
-                <a:spcPct val="115000"/>
+                <a:spcPct val="149500"/>
               </a:lnSpc>
             </a:pPr>
             <a:r>
@@ -8061,7 +7929,7 @@
           <a:p>
             <a:pPr>
               <a:lnSpc>
-                <a:spcPct val="115000"/>
+                <a:spcPct val="149500"/>
               </a:lnSpc>
             </a:pPr>
             <a:r>
@@ -8086,7 +7954,7 @@
           <a:p>
             <a:pPr>
               <a:lnSpc>
-                <a:spcPct val="115000"/>
+                <a:spcPct val="149500"/>
               </a:lnSpc>
             </a:pPr>
             <a:r>
@@ -8820,7 +8688,7 @@
           <a:p>
             <a:pPr>
               <a:lnSpc>
-                <a:spcPct val="115000"/>
+                <a:spcPct val="149500"/>
               </a:lnSpc>
             </a:pPr>
             <a:r>
@@ -8845,7 +8713,7 @@
           <a:p>
             <a:pPr>
               <a:lnSpc>
-                <a:spcPct val="115000"/>
+                <a:spcPct val="149500"/>
               </a:lnSpc>
             </a:pPr>
             <a:r>
@@ -8870,7 +8738,7 @@
           <a:p>
             <a:pPr>
               <a:lnSpc>
-                <a:spcPct val="115000"/>
+                <a:spcPct val="149500"/>
               </a:lnSpc>
             </a:pPr>
             <a:r>
@@ -9533,7 +9401,7 @@
           <a:p>
             <a:pPr>
               <a:lnSpc>
-                <a:spcPct val="115000"/>
+                <a:spcPct val="149500"/>
               </a:lnSpc>
             </a:pPr>
             <a:r>
@@ -9558,7 +9426,7 @@
           <a:p>
             <a:pPr>
               <a:lnSpc>
-                <a:spcPct val="115000"/>
+                <a:spcPct val="149500"/>
               </a:lnSpc>
             </a:pPr>
             <a:r>
@@ -9583,7 +9451,7 @@
           <a:p>
             <a:pPr>
               <a:lnSpc>
-                <a:spcPct val="115000"/>
+                <a:spcPct val="149500"/>
               </a:lnSpc>
             </a:pPr>
             <a:r>
@@ -9974,7 +9842,7 @@
           <a:p>
             <a:pPr>
               <a:lnSpc>
-                <a:spcPct val="115000"/>
+                <a:spcPct val="149500"/>
               </a:lnSpc>
             </a:pPr>
             <a:r>
@@ -9999,7 +9867,7 @@
           <a:p>
             <a:pPr>
               <a:lnSpc>
-                <a:spcPct val="115000"/>
+                <a:spcPct val="149500"/>
               </a:lnSpc>
             </a:pPr>
             <a:r>
@@ -10024,7 +9892,7 @@
           <a:p>
             <a:pPr>
               <a:lnSpc>
-                <a:spcPct val="115000"/>
+                <a:spcPct val="149500"/>
               </a:lnSpc>
             </a:pPr>
             <a:r>
@@ -10049,7 +9917,7 @@
           <a:p>
             <a:pPr>
               <a:lnSpc>
-                <a:spcPct val="115000"/>
+                <a:spcPct val="149500"/>
               </a:lnSpc>
             </a:pPr>
             <a:r>

--- a/class/cloud_infra_mgmt/06주차_Kubernetes핵심2/01_강의자료/2차시_PV와PVC실습.pptx
+++ b/class/cloud_infra_mgmt/06주차_Kubernetes핵심2/01_강의자료/2차시_PV와PVC실습.pptx
@@ -4755,6 +4755,8 @@
                   <a:srgbClr val="14B8A6"/>
                 </a:solidFill>
                 <a:latin typeface="맑은 고딕"/>
+                <a:ea typeface="맑은 고딕"/>
+                <a:cs typeface="맑은 고딕"/>
               </a:rPr>
               <a:t>클라우드인프라관리  ·  6주차 2차시</a:t>
             </a:r>
@@ -4790,6 +4792,8 @@
                   <a:srgbClr val="FFFFFF"/>
                 </a:solidFill>
                 <a:latin typeface="맑은 고딕"/>
+                <a:ea typeface="맑은 고딕"/>
+                <a:cs typeface="맑은 고딕"/>
               </a:rPr>
               <a:t>PV와 PVC로 데이터 지키기</a:t>
             </a:r>
@@ -4825,6 +4829,8 @@
                   <a:srgbClr val="C9D3E6"/>
                 </a:solidFill>
                 <a:latin typeface="맑은 고딕"/>
+                <a:ea typeface="맑은 고딕"/>
+                <a:cs typeface="맑은 고딕"/>
               </a:rPr>
               <a:t>K8s에서의 영구 저장소</a:t>
             </a:r>
@@ -4860,6 +4866,8 @@
                   <a:srgbClr val="FFFFFF"/>
                 </a:solidFill>
                 <a:latin typeface="맑은 고딕"/>
+                <a:ea typeface="맑은 고딕"/>
+                <a:cs typeface="맑은 고딕"/>
               </a:rPr>
               <a:t>영남이공대학교 김지윤교수</a:t>
             </a:r>
@@ -5019,6 +5027,8 @@
                   <a:srgbClr val="14213D"/>
                 </a:solidFill>
                 <a:latin typeface="맑은 고딕"/>
+                <a:ea typeface="맑은 고딕"/>
+                <a:cs typeface="맑은 고딕"/>
               </a:rPr>
               <a:t>03</a:t>
             </a:r>
@@ -5054,6 +5064,8 @@
                   <a:srgbClr val="14B8A6"/>
                 </a:solidFill>
                 <a:latin typeface="맑은 고딕"/>
+                <a:ea typeface="맑은 고딕"/>
+                <a:cs typeface="맑은 고딕"/>
               </a:rPr>
               <a:t>실습 안내</a:t>
             </a:r>
@@ -5089,6 +5101,8 @@
                   <a:srgbClr val="FFFFFF"/>
                 </a:solidFill>
                 <a:latin typeface="맑은 고딕"/>
+                <a:ea typeface="맑은 고딕"/>
+                <a:cs typeface="맑은 고딕"/>
               </a:rPr>
               <a:t>VM 안내</a:t>
             </a:r>
@@ -5128,6 +5142,8 @@
                   <a:srgbClr val="0D9488"/>
                 </a:solidFill>
                 <a:latin typeface="맑은 고딕"/>
+                <a:ea typeface="맑은 고딕"/>
+                <a:cs typeface="맑은 고딕"/>
               </a:rPr>
               <a:t>●  </a:t>
             </a:r>
@@ -5137,6 +5153,8 @@
                   <a:srgbClr val="222733"/>
                 </a:solidFill>
                 <a:latin typeface="맑은 고딕"/>
+                <a:ea typeface="맑은 고딕"/>
+                <a:cs typeface="맑은 고딕"/>
               </a:rPr>
               <a:t>개인 VM에서 동일하게 pv.yaml, pvc.yaml 작성 및 적용</a:t>
             </a:r>
@@ -5153,6 +5171,8 @@
                   <a:srgbClr val="0D9488"/>
                 </a:solidFill>
                 <a:latin typeface="맑은 고딕"/>
+                <a:ea typeface="맑은 고딕"/>
+                <a:cs typeface="맑은 고딕"/>
               </a:rPr>
               <a:t>●  </a:t>
             </a:r>
@@ -5162,6 +5182,8 @@
                   <a:srgbClr val="222733"/>
                 </a:solidFill>
                 <a:latin typeface="맑은 고딕"/>
+                <a:ea typeface="맑은 고딕"/>
+                <a:cs typeface="맑은 고딕"/>
               </a:rPr>
               <a:t>kubectl get pv / kubectl get pvc 결과 캡처 (STATUS: Bound 확인)</a:t>
             </a:r>
@@ -5178,6 +5200,8 @@
                   <a:srgbClr val="0D9488"/>
                 </a:solidFill>
                 <a:latin typeface="맑은 고딕"/>
+                <a:ea typeface="맑은 고딕"/>
+                <a:cs typeface="맑은 고딕"/>
               </a:rPr>
               <a:t>●  </a:t>
             </a:r>
@@ -5187,6 +5211,8 @@
                   <a:srgbClr val="222733"/>
                 </a:solidFill>
                 <a:latin typeface="맑은 고딕"/>
+                <a:ea typeface="맑은 고딕"/>
+                <a:cs typeface="맑은 고딕"/>
               </a:rPr>
               <a:t>다음 3차시에 이 PVC를 MySQL Pod에 실제로 연결합니다</a:t>
             </a:r>
@@ -5222,6 +5248,8 @@
                   <a:srgbClr val="5B6373"/>
                 </a:solidFill>
                 <a:latin typeface="맑은 고딕"/>
+                <a:ea typeface="맑은 고딕"/>
+                <a:cs typeface="맑은 고딕"/>
               </a:rPr>
               <a:t>클라우드인프라관리  ·  6주차 2차시</a:t>
             </a:r>
@@ -5257,6 +5285,8 @@
                   <a:srgbClr val="5B6373"/>
                 </a:solidFill>
                 <a:latin typeface="맑은 고딕"/>
+                <a:ea typeface="맑은 고딕"/>
+                <a:cs typeface="맑은 고딕"/>
               </a:rPr>
               <a:t>10 / 12</a:t>
             </a:r>
@@ -5442,6 +5472,8 @@
                   <a:srgbClr val="FFFFFF"/>
                 </a:solidFill>
                 <a:latin typeface="맑은 고딕"/>
+                <a:ea typeface="맑은 고딕"/>
+                <a:cs typeface="맑은 고딕"/>
               </a:rPr>
               <a:t>오늘의 정리</a:t>
             </a:r>
@@ -5495,6 +5527,8 @@
                   <a:srgbClr val="14213D"/>
                 </a:solidFill>
                 <a:latin typeface="맑은 고딕"/>
+                <a:ea typeface="맑은 고딕"/>
+                <a:cs typeface="맑은 고딕"/>
               </a:rPr>
               <a:t>1</a:t>
             </a:r>
@@ -5530,6 +5564,8 @@
                   <a:srgbClr val="FFFFFF"/>
                 </a:solidFill>
                 <a:latin typeface="맑은 고딕"/>
+                <a:ea typeface="맑은 고딕"/>
+                <a:cs typeface="맑은 고딕"/>
               </a:rPr>
               <a:t>PV = 실제 저장공간, PVC = 그 저장공간을 향한 요청서</a:t>
             </a:r>
@@ -5583,6 +5619,8 @@
                   <a:srgbClr val="14213D"/>
                 </a:solidFill>
                 <a:latin typeface="맑은 고딕"/>
+                <a:ea typeface="맑은 고딕"/>
+                <a:cs typeface="맑은 고딕"/>
               </a:rPr>
               <a:t>2</a:t>
             </a:r>
@@ -5618,6 +5656,8 @@
                   <a:srgbClr val="FFFFFF"/>
                 </a:solidFill>
                 <a:latin typeface="맑은 고딕"/>
+                <a:ea typeface="맑은 고딕"/>
+                <a:cs typeface="맑은 고딕"/>
               </a:rPr>
               <a:t>hostPath PV는 VM 디렉토리를 그대로 사용해 데이터를 보존한다</a:t>
             </a:r>
@@ -5759,6 +5799,8 @@
                   <a:srgbClr val="FFFFFF"/>
                 </a:solidFill>
                 <a:latin typeface="맑은 고딕"/>
+                <a:ea typeface="맑은 고딕"/>
+                <a:cs typeface="맑은 고딕"/>
               </a:rPr>
               <a:t>다음 차시 예고</a:t>
             </a:r>
@@ -5794,6 +5836,8 @@
                   <a:srgbClr val="14B8A6"/>
                 </a:solidFill>
                 <a:latin typeface="맑은 고딕"/>
+                <a:ea typeface="맑은 고딕"/>
+                <a:cs typeface="맑은 고딕"/>
               </a:rPr>
               <a:t>다음 차시 예고 — 6주차 3차시</a:t>
             </a:r>
@@ -5829,6 +5873,8 @@
                   <a:srgbClr val="FFFFFF"/>
                 </a:solidFill>
                 <a:latin typeface="맑은 고딕"/>
+                <a:ea typeface="맑은 고딕"/>
+                <a:cs typeface="맑은 고딕"/>
               </a:rPr>
               <a:t>오늘 만든 PV/PVC를 실제 MySQL Pod에 연결하고, minikube를 재시작해도 데이터베이스 데이터가 그대로 유지되는지 직접 확인합니다.</a:t>
             </a:r>
@@ -5970,6 +6016,8 @@
                   <a:srgbClr val="14B8A6"/>
                 </a:solidFill>
                 <a:latin typeface="맑은 고딕"/>
+                <a:ea typeface="맑은 고딕"/>
+                <a:cs typeface="맑은 고딕"/>
               </a:rPr>
               <a:t>SESSION OVERVIEW</a:t>
             </a:r>
@@ -6005,6 +6053,8 @@
                   <a:srgbClr val="FFFFFF"/>
                 </a:solidFill>
                 <a:latin typeface="맑은 고딕"/>
+                <a:ea typeface="맑은 고딕"/>
+                <a:cs typeface="맑은 고딕"/>
               </a:rPr>
               <a:t>오늘의 학습 목표</a:t>
             </a:r>
@@ -6044,6 +6094,8 @@
                   <a:srgbClr val="222733"/>
                 </a:solidFill>
                 <a:latin typeface="맑은 고딕"/>
+                <a:ea typeface="맑은 고딕"/>
+                <a:cs typeface="맑은 고딕"/>
               </a:rPr>
               <a:t>1.  K8s에서도 Pod가 사라지면 데이터가 사라지는 문제를 이해한다</a:t>
             </a:r>
@@ -6060,6 +6112,8 @@
                   <a:srgbClr val="222733"/>
                 </a:solidFill>
                 <a:latin typeface="맑은 고딕"/>
+                <a:ea typeface="맑은 고딕"/>
+                <a:cs typeface="맑은 고딕"/>
               </a:rPr>
               <a:t>2.  PV와 PVC의 역할 차이를 이해한다</a:t>
             </a:r>
@@ -6076,6 +6130,8 @@
                   <a:srgbClr val="222733"/>
                 </a:solidFill>
                 <a:latin typeface="맑은 고딕"/>
+                <a:ea typeface="맑은 고딕"/>
+                <a:cs typeface="맑은 고딕"/>
               </a:rPr>
               <a:t>3.  hostPath 기반 PV를 만들고 PVC로 연결해본다</a:t>
             </a:r>
@@ -6111,6 +6167,8 @@
                   <a:srgbClr val="5B6373"/>
                 </a:solidFill>
                 <a:latin typeface="맑은 고딕"/>
+                <a:ea typeface="맑은 고딕"/>
+                <a:cs typeface="맑은 고딕"/>
               </a:rPr>
               <a:t>클라우드인프라관리  ·  6주차 2차시</a:t>
             </a:r>
@@ -6146,6 +6204,8 @@
                   <a:srgbClr val="5B6373"/>
                 </a:solidFill>
                 <a:latin typeface="맑은 고딕"/>
+                <a:ea typeface="맑은 고딕"/>
+                <a:cs typeface="맑은 고딕"/>
               </a:rPr>
               <a:t>02 / 12</a:t>
             </a:r>
@@ -6331,6 +6391,8 @@
                   <a:srgbClr val="14B8A6"/>
                 </a:solidFill>
                 <a:latin typeface="맑은 고딕"/>
+                <a:ea typeface="맑은 고딕"/>
+                <a:cs typeface="맑은 고딕"/>
               </a:rPr>
               <a:t>SESSION OVERVIEW</a:t>
             </a:r>
@@ -6366,6 +6428,8 @@
                   <a:srgbClr val="FFFFFF"/>
                 </a:solidFill>
                 <a:latin typeface="맑은 고딕"/>
+                <a:ea typeface="맑은 고딕"/>
+                <a:cs typeface="맑은 고딕"/>
               </a:rPr>
               <a:t>오늘의 진행 순서</a:t>
             </a:r>
@@ -6577,6 +6641,8 @@
                   <a:srgbClr val="FFFFFF"/>
                 </a:solidFill>
                 <a:latin typeface="맑은 고딕"/>
+                <a:ea typeface="맑은 고딕"/>
+                <a:cs typeface="맑은 고딕"/>
               </a:rPr>
               <a:t>1</a:t>
             </a:r>
@@ -6660,6 +6726,8 @@
                   <a:srgbClr val="14213D"/>
                 </a:solidFill>
                 <a:latin typeface="맑은 고딕"/>
+                <a:ea typeface="맑은 고딕"/>
+                <a:cs typeface="맑은 고딕"/>
               </a:rPr>
               <a:t>개념 설명</a:t>
             </a:r>
@@ -6699,6 +6767,8 @@
                   <a:srgbClr val="222733"/>
                 </a:solidFill>
                 <a:latin typeface="맑은 고딕"/>
+                <a:ea typeface="맑은 고딕"/>
+                <a:cs typeface="맑은 고딕"/>
               </a:rPr>
               <a:t>강의자료 기반 직접 강의</a:t>
             </a:r>
@@ -6778,6 +6848,8 @@
                   <a:srgbClr val="FFFFFF"/>
                 </a:solidFill>
                 <a:latin typeface="맑은 고딕"/>
+                <a:ea typeface="맑은 고딕"/>
+                <a:cs typeface="맑은 고딕"/>
               </a:rPr>
               <a:t>2</a:t>
             </a:r>
@@ -6861,6 +6933,8 @@
                   <a:srgbClr val="14213D"/>
                 </a:solidFill>
                 <a:latin typeface="맑은 고딕"/>
+                <a:ea typeface="맑은 고딕"/>
+                <a:cs typeface="맑은 고딕"/>
               </a:rPr>
               <a:t>Killercoda</a:t>
             </a:r>
@@ -6900,6 +6974,8 @@
                   <a:srgbClr val="222733"/>
                 </a:solidFill>
                 <a:latin typeface="맑은 고딕"/>
+                <a:ea typeface="맑은 고딕"/>
+                <a:cs typeface="맑은 고딕"/>
               </a:rPr>
               <a:t>PV/PVC 생성 실습</a:t>
             </a:r>
@@ -6979,6 +7055,8 @@
                   <a:srgbClr val="FFFFFF"/>
                 </a:solidFill>
                 <a:latin typeface="맑은 고딕"/>
+                <a:ea typeface="맑은 고딕"/>
+                <a:cs typeface="맑은 고딕"/>
               </a:rPr>
               <a:t>3</a:t>
             </a:r>
@@ -7062,6 +7140,8 @@
                   <a:srgbClr val="14213D"/>
                 </a:solidFill>
                 <a:latin typeface="맑은 고딕"/>
+                <a:ea typeface="맑은 고딕"/>
+                <a:cs typeface="맑은 고딕"/>
               </a:rPr>
               <a:t>VM 안내</a:t>
             </a:r>
@@ -7101,6 +7181,8 @@
                   <a:srgbClr val="222733"/>
                 </a:solidFill>
                 <a:latin typeface="맑은 고딕"/>
+                <a:ea typeface="맑은 고딕"/>
+                <a:cs typeface="맑은 고딕"/>
               </a:rPr>
               <a:t>VM에서 동일 실습</a:t>
             </a:r>
@@ -7180,6 +7262,8 @@
                   <a:srgbClr val="FFFFFF"/>
                 </a:solidFill>
                 <a:latin typeface="맑은 고딕"/>
+                <a:ea typeface="맑은 고딕"/>
+                <a:cs typeface="맑은 고딕"/>
               </a:rPr>
               <a:t>4</a:t>
             </a:r>
@@ -7263,6 +7347,8 @@
                   <a:srgbClr val="14213D"/>
                 </a:solidFill>
                 <a:latin typeface="맑은 고딕"/>
+                <a:ea typeface="맑은 고딕"/>
+                <a:cs typeface="맑은 고딕"/>
               </a:rPr>
               <a:t>결과 제출</a:t>
             </a:r>
@@ -7302,6 +7388,8 @@
                   <a:srgbClr val="222733"/>
                 </a:solidFill>
                 <a:latin typeface="맑은 고딕"/>
+                <a:ea typeface="맑은 고딕"/>
+                <a:cs typeface="맑은 고딕"/>
               </a:rPr>
               <a:t>체크리스트 제출</a:t>
             </a:r>
@@ -7337,6 +7425,8 @@
                   <a:srgbClr val="5B6373"/>
                 </a:solidFill>
                 <a:latin typeface="맑은 고딕"/>
+                <a:ea typeface="맑은 고딕"/>
+                <a:cs typeface="맑은 고딕"/>
               </a:rPr>
               <a:t>클라우드인프라관리  ·  6주차 2차시</a:t>
             </a:r>
@@ -7372,6 +7462,8 @@
                   <a:srgbClr val="5B6373"/>
                 </a:solidFill>
                 <a:latin typeface="맑은 고딕"/>
+                <a:ea typeface="맑은 고딕"/>
+                <a:cs typeface="맑은 고딕"/>
               </a:rPr>
               <a:t>03 / 12</a:t>
             </a:r>
@@ -7575,6 +7667,8 @@
                   <a:srgbClr val="14213D"/>
                 </a:solidFill>
                 <a:latin typeface="맑은 고딕"/>
+                <a:ea typeface="맑은 고딕"/>
+                <a:cs typeface="맑은 고딕"/>
               </a:rPr>
               <a:t>PART 01</a:t>
             </a:r>
@@ -7610,6 +7704,8 @@
                   <a:srgbClr val="FFFFFF"/>
                 </a:solidFill>
                 <a:latin typeface="맑은 고딕"/>
+                <a:ea typeface="맑은 고딕"/>
+                <a:cs typeface="맑은 고딕"/>
               </a:rPr>
               <a:t>K8s에서도 데이터가 사라진다</a:t>
             </a:r>
@@ -7645,6 +7741,8 @@
                   <a:srgbClr val="C9D3E6"/>
                 </a:solidFill>
                 <a:latin typeface="맑은 고딕"/>
+                <a:ea typeface="맑은 고딕"/>
+                <a:cs typeface="맑은 고딕"/>
               </a:rPr>
               <a:t>2주차 문제의 K8s 버전</a:t>
             </a:r>
@@ -7804,6 +7902,8 @@
                   <a:srgbClr val="14213D"/>
                 </a:solidFill>
                 <a:latin typeface="맑은 고딕"/>
+                <a:ea typeface="맑은 고딕"/>
+                <a:cs typeface="맑은 고딕"/>
               </a:rPr>
               <a:t>01</a:t>
             </a:r>
@@ -7839,6 +7939,8 @@
                   <a:srgbClr val="14B8A6"/>
                 </a:solidFill>
                 <a:latin typeface="맑은 고딕"/>
+                <a:ea typeface="맑은 고딕"/>
+                <a:cs typeface="맑은 고딕"/>
               </a:rPr>
               <a:t>PART 1 · K8s의 데이터 문제</a:t>
             </a:r>
@@ -7874,6 +7976,8 @@
                   <a:srgbClr val="FFFFFF"/>
                 </a:solidFill>
                 <a:latin typeface="맑은 고딕"/>
+                <a:ea typeface="맑은 고딕"/>
+                <a:cs typeface="맑은 고딕"/>
               </a:rPr>
               <a:t>Pod도 결국 컨테이너다</a:t>
             </a:r>
@@ -7913,6 +8017,8 @@
                   <a:srgbClr val="0D9488"/>
                 </a:solidFill>
                 <a:latin typeface="맑은 고딕"/>
+                <a:ea typeface="맑은 고딕"/>
+                <a:cs typeface="맑은 고딕"/>
               </a:rPr>
               <a:t>●  </a:t>
             </a:r>
@@ -7922,6 +8028,8 @@
                   <a:srgbClr val="222733"/>
                 </a:solidFill>
                 <a:latin typeface="맑은 고딕"/>
+                <a:ea typeface="맑은 고딕"/>
+                <a:cs typeface="맑은 고딕"/>
               </a:rPr>
               <a:t>2주차에서 배운 대로, 컨테이너를 지우면 그 안 데이터는 사라짐</a:t>
             </a:r>
@@ -7938,6 +8046,8 @@
                   <a:srgbClr val="0D9488"/>
                 </a:solidFill>
                 <a:latin typeface="맑은 고딕"/>
+                <a:ea typeface="맑은 고딕"/>
+                <a:cs typeface="맑은 고딕"/>
               </a:rPr>
               <a:t>●  </a:t>
             </a:r>
@@ -7947,6 +8057,8 @@
                   <a:srgbClr val="222733"/>
                 </a:solidFill>
                 <a:latin typeface="맑은 고딕"/>
+                <a:ea typeface="맑은 고딕"/>
+                <a:cs typeface="맑은 고딕"/>
               </a:rPr>
               <a:t>K8s의 Pod도 결국 컨테이너를 감싼 것 — 똑같은 문제를 가짐</a:t>
             </a:r>
@@ -7963,6 +8075,8 @@
                   <a:srgbClr val="0D9488"/>
                 </a:solidFill>
                 <a:latin typeface="맑은 고딕"/>
+                <a:ea typeface="맑은 고딕"/>
+                <a:cs typeface="맑은 고딕"/>
               </a:rPr>
               <a:t>●  </a:t>
             </a:r>
@@ -7972,6 +8086,8 @@
                   <a:srgbClr val="222733"/>
                 </a:solidFill>
                 <a:latin typeface="맑은 고딕"/>
+                <a:ea typeface="맑은 고딕"/>
+                <a:cs typeface="맑은 고딕"/>
               </a:rPr>
               <a:t>게다가 Pod는 4주차에 배운 대로 자주 재생성됨 (그때마다 데이터가 초기화된다면?)</a:t>
             </a:r>
@@ -8051,6 +8167,8 @@
                   <a:srgbClr val="FFFFFF"/>
                 </a:solidFill>
                 <a:latin typeface="맑은 고딕"/>
+                <a:ea typeface="맑은 고딕"/>
+                <a:cs typeface="맑은 고딕"/>
               </a:rPr>
               <a:t>😰  DB처럼 데이터가 중요한 서비스라면</a:t>
             </a:r>
@@ -8086,6 +8204,8 @@
                   <a:srgbClr val="FFFFFF"/>
                 </a:solidFill>
                 <a:latin typeface="맑은 고딕"/>
+                <a:ea typeface="맑은 고딕"/>
+                <a:cs typeface="맑은 고딕"/>
               </a:rPr>
               <a:t>Pod가 재시작될 때마다 데이터가 날아간다면 사용할 수 없다</a:t>
             </a:r>
@@ -8121,6 +8241,8 @@
                   <a:srgbClr val="5B6373"/>
                 </a:solidFill>
                 <a:latin typeface="맑은 고딕"/>
+                <a:ea typeface="맑은 고딕"/>
+                <a:cs typeface="맑은 고딕"/>
               </a:rPr>
               <a:t>클라우드인프라관리  ·  6주차 2차시</a:t>
             </a:r>
@@ -8156,6 +8278,8 @@
                   <a:srgbClr val="5B6373"/>
                 </a:solidFill>
                 <a:latin typeface="맑은 고딕"/>
+                <a:ea typeface="맑은 고딕"/>
+                <a:cs typeface="맑은 고딕"/>
               </a:rPr>
               <a:t>05 / 12</a:t>
             </a:r>
@@ -8359,6 +8483,8 @@
                   <a:srgbClr val="14213D"/>
                 </a:solidFill>
                 <a:latin typeface="맑은 고딕"/>
+                <a:ea typeface="맑은 고딕"/>
+                <a:cs typeface="맑은 고딕"/>
               </a:rPr>
               <a:t>PART 02</a:t>
             </a:r>
@@ -8394,6 +8520,8 @@
                   <a:srgbClr val="FFFFFF"/>
                 </a:solidFill>
                 <a:latin typeface="맑은 고딕"/>
+                <a:ea typeface="맑은 고딕"/>
+                <a:cs typeface="맑은 고딕"/>
               </a:rPr>
               <a:t>PV와 PVC</a:t>
             </a:r>
@@ -8429,6 +8557,8 @@
                   <a:srgbClr val="C9D3E6"/>
                 </a:solidFill>
                 <a:latin typeface="맑은 고딕"/>
+                <a:ea typeface="맑은 고딕"/>
+                <a:cs typeface="맑은 고딕"/>
               </a:rPr>
               <a:t>저장공간과, 그 저장공간을 향한 요청</a:t>
             </a:r>
@@ -8588,6 +8718,8 @@
                   <a:srgbClr val="14213D"/>
                 </a:solidFill>
                 <a:latin typeface="맑은 고딕"/>
+                <a:ea typeface="맑은 고딕"/>
+                <a:cs typeface="맑은 고딕"/>
               </a:rPr>
               <a:t>02</a:t>
             </a:r>
@@ -8623,6 +8755,8 @@
                   <a:srgbClr val="14B8A6"/>
                 </a:solidFill>
                 <a:latin typeface="맑은 고딕"/>
+                <a:ea typeface="맑은 고딕"/>
+                <a:cs typeface="맑은 고딕"/>
               </a:rPr>
               <a:t>PART 2 · PV와 PVC</a:t>
             </a:r>
@@ -8658,6 +8792,8 @@
                   <a:srgbClr val="FFFFFF"/>
                 </a:solidFill>
                 <a:latin typeface="맑은 고딕"/>
+                <a:ea typeface="맑은 고딕"/>
+                <a:cs typeface="맑은 고딕"/>
               </a:rPr>
               <a:t>PV와 PVC의 관계</a:t>
             </a:r>
@@ -8697,6 +8833,8 @@
                   <a:srgbClr val="0D9488"/>
                 </a:solidFill>
                 <a:latin typeface="맑은 고딕"/>
+                <a:ea typeface="맑은 고딕"/>
+                <a:cs typeface="맑은 고딕"/>
               </a:rPr>
               <a:t>●  </a:t>
             </a:r>
@@ -8706,6 +8844,8 @@
                   <a:srgbClr val="222733"/>
                 </a:solidFill>
                 <a:latin typeface="맑은 고딕"/>
+                <a:ea typeface="맑은 고딕"/>
+                <a:cs typeface="맑은 고딕"/>
               </a:rPr>
               <a:t>PV(PersistentVolume) = 실제로 존재하는 저장공간 그 자체</a:t>
             </a:r>
@@ -8722,6 +8862,8 @@
                   <a:srgbClr val="0D9488"/>
                 </a:solidFill>
                 <a:latin typeface="맑은 고딕"/>
+                <a:ea typeface="맑은 고딕"/>
+                <a:cs typeface="맑은 고딕"/>
               </a:rPr>
               <a:t>●  </a:t>
             </a:r>
@@ -8731,6 +8873,8 @@
                   <a:srgbClr val="222733"/>
                 </a:solidFill>
                 <a:latin typeface="맑은 고딕"/>
+                <a:ea typeface="맑은 고딕"/>
+                <a:cs typeface="맑은 고딕"/>
               </a:rPr>
               <a:t>PVC(PersistentVolumeClaim) = "이런 저장공간이 필요해"라는 요청서</a:t>
             </a:r>
@@ -8747,6 +8891,8 @@
                   <a:srgbClr val="0D9488"/>
                 </a:solidFill>
                 <a:latin typeface="맑은 고딕"/>
+                <a:ea typeface="맑은 고딕"/>
+                <a:cs typeface="맑은 고딕"/>
               </a:rPr>
               <a:t>●  </a:t>
             </a:r>
@@ -8756,6 +8902,8 @@
                   <a:srgbClr val="222733"/>
                 </a:solidFill>
                 <a:latin typeface="맑은 고딕"/>
+                <a:ea typeface="맑은 고딕"/>
+                <a:cs typeface="맑은 고딕"/>
               </a:rPr>
               <a:t>Pod는 PVC를 통해 PV에 연결됨 — Pod가 PV를 직접 알 필요 없음</a:t>
             </a:r>
@@ -8791,6 +8939,8 @@
                   <a:srgbClr val="14213D"/>
                 </a:solidFill>
                 <a:latin typeface="맑은 고딕"/>
+                <a:ea typeface="맑은 고딕"/>
+                <a:cs typeface="맑은 고딕"/>
               </a:rPr>
               <a:t>연결 구조</a:t>
             </a:r>
@@ -8870,6 +9020,8 @@
                   <a:srgbClr val="FFFFFF"/>
                 </a:solidFill>
                 <a:latin typeface="맑은 고딕"/>
+                <a:ea typeface="맑은 고딕"/>
+                <a:cs typeface="맑은 고딕"/>
               </a:rPr>
               <a:t>Pod</a:t>
             </a:r>
@@ -8949,6 +9101,8 @@
                   <a:srgbClr val="FFFFFF"/>
                 </a:solidFill>
                 <a:latin typeface="맑은 고딕"/>
+                <a:ea typeface="맑은 고딕"/>
+                <a:cs typeface="맑은 고딕"/>
               </a:rPr>
               <a:t>↕ PVC (요청서)</a:t>
             </a:r>
@@ -9028,6 +9182,8 @@
                   <a:srgbClr val="FFFFFF"/>
                 </a:solidFill>
                 <a:latin typeface="맑은 고딕"/>
+                <a:ea typeface="맑은 고딕"/>
+                <a:cs typeface="맑은 고딕"/>
               </a:rPr>
               <a:t>PV (실제 저장공간, 예: VM의 /data/mysql)</a:t>
             </a:r>
@@ -9063,6 +9219,8 @@
                   <a:srgbClr val="5B6373"/>
                 </a:solidFill>
                 <a:latin typeface="맑은 고딕"/>
+                <a:ea typeface="맑은 고딕"/>
+                <a:cs typeface="맑은 고딕"/>
               </a:rPr>
               <a:t>클라우드인프라관리  ·  6주차 2차시</a:t>
             </a:r>
@@ -9098,6 +9256,8 @@
                   <a:srgbClr val="5B6373"/>
                 </a:solidFill>
                 <a:latin typeface="맑은 고딕"/>
+                <a:ea typeface="맑은 고딕"/>
+                <a:cs typeface="맑은 고딕"/>
               </a:rPr>
               <a:t>07 / 12</a:t>
             </a:r>
@@ -9301,6 +9461,8 @@
                   <a:srgbClr val="14213D"/>
                 </a:solidFill>
                 <a:latin typeface="맑은 고딕"/>
+                <a:ea typeface="맑은 고딕"/>
+                <a:cs typeface="맑은 고딕"/>
               </a:rPr>
               <a:t>02</a:t>
             </a:r>
@@ -9336,6 +9498,8 @@
                   <a:srgbClr val="14B8A6"/>
                 </a:solidFill>
                 <a:latin typeface="맑은 고딕"/>
+                <a:ea typeface="맑은 고딕"/>
+                <a:cs typeface="맑은 고딕"/>
               </a:rPr>
               <a:t>PART 2 · PV와 PVC</a:t>
             </a:r>
@@ -9371,6 +9535,8 @@
                   <a:srgbClr val="FFFFFF"/>
                 </a:solidFill>
                 <a:latin typeface="맑은 고딕"/>
+                <a:ea typeface="맑은 고딕"/>
+                <a:cs typeface="맑은 고딕"/>
               </a:rPr>
               <a:t>hostPath로 PV 만들기</a:t>
             </a:r>
@@ -9410,6 +9576,8 @@
                   <a:srgbClr val="0D9488"/>
                 </a:solidFill>
                 <a:latin typeface="맑은 고딕"/>
+                <a:ea typeface="맑은 고딕"/>
+                <a:cs typeface="맑은 고딕"/>
               </a:rPr>
               <a:t>●  </a:t>
             </a:r>
@@ -9419,6 +9587,8 @@
                   <a:srgbClr val="222733"/>
                 </a:solidFill>
                 <a:latin typeface="맑은 고딕"/>
+                <a:ea typeface="맑은 고딕"/>
+                <a:cs typeface="맑은 고딕"/>
               </a:rPr>
               <a:t>hostPath = VM(노드)의 특정 디렉토리를 PV로 그대로 사용하는 방식</a:t>
             </a:r>
@@ -9435,6 +9605,8 @@
                   <a:srgbClr val="0D9488"/>
                 </a:solidFill>
                 <a:latin typeface="맑은 고딕"/>
+                <a:ea typeface="맑은 고딕"/>
+                <a:cs typeface="맑은 고딕"/>
               </a:rPr>
               <a:t>●  </a:t>
             </a:r>
@@ -9444,6 +9616,8 @@
                   <a:srgbClr val="222733"/>
                 </a:solidFill>
                 <a:latin typeface="맑은 고딕"/>
+                <a:ea typeface="맑은 고딕"/>
+                <a:cs typeface="맑은 고딕"/>
               </a:rPr>
               <a:t>2주차 Bind Mount와 원리가 비슷함 — VM 디렉토리에 실제로 저장됨</a:t>
             </a:r>
@@ -9460,6 +9634,8 @@
                   <a:srgbClr val="0D9488"/>
                 </a:solidFill>
                 <a:latin typeface="맑은 고딕"/>
+                <a:ea typeface="맑은 고딕"/>
+                <a:cs typeface="맑은 고딕"/>
               </a:rPr>
               <a:t>●  </a:t>
             </a:r>
@@ -9469,6 +9645,8 @@
                   <a:srgbClr val="222733"/>
                 </a:solidFill>
                 <a:latin typeface="맑은 고딕"/>
+                <a:ea typeface="맑은 고딕"/>
+                <a:cs typeface="맑은 고딕"/>
               </a:rPr>
               <a:t>pv.yaml에 storage 용량, accessModes, hostPath 경로를 지정</a:t>
             </a:r>
@@ -9504,6 +9682,8 @@
                   <a:srgbClr val="5B6373"/>
                 </a:solidFill>
                 <a:latin typeface="맑은 고딕"/>
+                <a:ea typeface="맑은 고딕"/>
+                <a:cs typeface="맑은 고딕"/>
               </a:rPr>
               <a:t>클라우드인프라관리  ·  6주차 2차시</a:t>
             </a:r>
@@ -9539,6 +9719,8 @@
                   <a:srgbClr val="5B6373"/>
                 </a:solidFill>
                 <a:latin typeface="맑은 고딕"/>
+                <a:ea typeface="맑은 고딕"/>
+                <a:cs typeface="맑은 고딕"/>
               </a:rPr>
               <a:t>08 / 12</a:t>
             </a:r>
@@ -9742,6 +9924,8 @@
                   <a:srgbClr val="14213D"/>
                 </a:solidFill>
                 <a:latin typeface="맑은 고딕"/>
+                <a:ea typeface="맑은 고딕"/>
+                <a:cs typeface="맑은 고딕"/>
               </a:rPr>
               <a:t>03</a:t>
             </a:r>
@@ -9777,6 +9961,8 @@
                   <a:srgbClr val="14B8A6"/>
                 </a:solidFill>
                 <a:latin typeface="맑은 고딕"/>
+                <a:ea typeface="맑은 고딕"/>
+                <a:cs typeface="맑은 고딕"/>
               </a:rPr>
               <a:t>실습 안내</a:t>
             </a:r>
@@ -9812,6 +9998,8 @@
                   <a:srgbClr val="FFFFFF"/>
                 </a:solidFill>
                 <a:latin typeface="맑은 고딕"/>
+                <a:ea typeface="맑은 고딕"/>
+                <a:cs typeface="맑은 고딕"/>
               </a:rPr>
               <a:t>Killercoda — PV/PVC 생성</a:t>
             </a:r>
@@ -9851,6 +10039,8 @@
                   <a:srgbClr val="0D9488"/>
                 </a:solidFill>
                 <a:latin typeface="맑은 고딕"/>
+                <a:ea typeface="맑은 고딕"/>
+                <a:cs typeface="맑은 고딕"/>
               </a:rPr>
               <a:t>●  </a:t>
             </a:r>
@@ -9860,6 +10050,8 @@
                   <a:srgbClr val="222733"/>
                 </a:solidFill>
                 <a:latin typeface="맑은 고딕"/>
+                <a:ea typeface="맑은 고딕"/>
+                <a:cs typeface="맑은 고딕"/>
               </a:rPr>
               <a:t>pv.yaml 작성 (hostPath: /data/mysql, storage: 1Gi)</a:t>
             </a:r>
@@ -9876,6 +10068,8 @@
                   <a:srgbClr val="0D9488"/>
                 </a:solidFill>
                 <a:latin typeface="맑은 고딕"/>
+                <a:ea typeface="맑은 고딕"/>
+                <a:cs typeface="맑은 고딕"/>
               </a:rPr>
               <a:t>●  </a:t>
             </a:r>
@@ -9885,6 +10079,8 @@
                   <a:srgbClr val="222733"/>
                 </a:solidFill>
                 <a:latin typeface="맑은 고딕"/>
+                <a:ea typeface="맑은 고딕"/>
+                <a:cs typeface="맑은 고딕"/>
               </a:rPr>
               <a:t>pvc.yaml 작성 (PV가 제공하는 만큼의 storage 요청)</a:t>
             </a:r>
@@ -9901,6 +10097,8 @@
                   <a:srgbClr val="0D9488"/>
                 </a:solidFill>
                 <a:latin typeface="맑은 고딕"/>
+                <a:ea typeface="맑은 고딕"/>
+                <a:cs typeface="맑은 고딕"/>
               </a:rPr>
               <a:t>●  </a:t>
             </a:r>
@@ -9910,6 +10108,8 @@
                   <a:srgbClr val="222733"/>
                 </a:solidFill>
                 <a:latin typeface="맑은 고딕"/>
+                <a:ea typeface="맑은 고딕"/>
+                <a:cs typeface="맑은 고딕"/>
               </a:rPr>
               <a:t>kubectl apply -f pv.yaml / pvc.yaml</a:t>
             </a:r>
@@ -9926,6 +10126,8 @@
                   <a:srgbClr val="0D9488"/>
                 </a:solidFill>
                 <a:latin typeface="맑은 고딕"/>
+                <a:ea typeface="맑은 고딕"/>
+                <a:cs typeface="맑은 고딕"/>
               </a:rPr>
               <a:t>●  </a:t>
             </a:r>
@@ -9935,6 +10137,8 @@
                   <a:srgbClr val="222733"/>
                 </a:solidFill>
                 <a:latin typeface="맑은 고딕"/>
+                <a:ea typeface="맑은 고딕"/>
+                <a:cs typeface="맑은 고딕"/>
               </a:rPr>
               <a:t>kubectl get pv, kubectl get pvc  — STATUS가 Bound인지 확인</a:t>
             </a:r>
@@ -9970,6 +10174,8 @@
                   <a:srgbClr val="5B6373"/>
                 </a:solidFill>
                 <a:latin typeface="맑은 고딕"/>
+                <a:ea typeface="맑은 고딕"/>
+                <a:cs typeface="맑은 고딕"/>
               </a:rPr>
               <a:t>클라우드인프라관리  ·  6주차 2차시</a:t>
             </a:r>
@@ -10005,6 +10211,8 @@
                   <a:srgbClr val="5B6373"/>
                 </a:solidFill>
                 <a:latin typeface="맑은 고딕"/>
+                <a:ea typeface="맑은 고딕"/>
+                <a:cs typeface="맑은 고딕"/>
               </a:rPr>
               <a:t>09 / 12</a:t>
             </a:r>
